--- a/SIH2026_SIH26193_KrishiSmriti_ClaudeMaxDedo.pptx
+++ b/SIH2026_SIH26193_KrishiSmriti_ClaudeMaxDedo.pptx
@@ -5653,6 +5653,7 @@
               <a:spcAft>
                 <a:spcPts val="1000"/>
               </a:spcAft>
+              <a:buNone/>
             </a:pPr>
             <a:r>
               <a:rPr sz="1800" b="1">
@@ -5682,6 +5683,7 @@
               <a:spcAft>
                 <a:spcPts val="1000"/>
               </a:spcAft>
+              <a:buNone/>
             </a:pPr>
             <a:r>
               <a:rPr sz="1800" b="1">
@@ -5710,6 +5712,7 @@
               <a:spcAft>
                 <a:spcPts val="1000"/>
               </a:spcAft>
+              <a:buNone/>
             </a:pPr>
             <a:r>
               <a:rPr sz="1800" b="1">
@@ -5738,6 +5741,7 @@
               <a:spcAft>
                 <a:spcPts val="1000"/>
               </a:spcAft>
+              <a:buNone/>
             </a:pPr>
             <a:r>
               <a:rPr sz="1800" b="1">
@@ -5766,6 +5770,7 @@
               <a:spcAft>
                 <a:spcPts val="1000"/>
               </a:spcAft>
+              <a:buNone/>
             </a:pPr>
             <a:r>
               <a:rPr sz="1800" b="1">
@@ -5794,6 +5799,7 @@
               <a:spcAft>
                 <a:spcPts val="1000"/>
               </a:spcAft>
+              <a:buNone/>
             </a:pPr>
             <a:r>
               <a:rPr sz="1800" b="1">
@@ -5941,17 +5947,19 @@
         </p:nvSpPr>
         <p:spPr>
           <a:xfrm>
-            <a:off x="182998" y="0"/>
-            <a:ext cx="10972800" cy="1143000"/>
+            <a:off x="1691640" y="164592"/>
+            <a:ext cx="7955279" cy="868680"/>
           </a:xfrm>
         </p:spPr>
         <p:txBody>
-          <a:bodyPr/>
+          <a:bodyPr wrap="square"/>
           <a:lstStyle/>
           <a:p>
-            <a:pPr eaLnBrk="1" hangingPunct="1"/>
-            <a:r>
-              <a:rPr sz="2300" b="1">
+            <a:pPr eaLnBrk="1" hangingPunct="1" algn="l">
+              <a:buNone/>
+            </a:pPr>
+            <a:r>
+              <a:rPr sz="1900" b="1">
                 <a:solidFill>
                   <a:srgbClr val="14532D"/>
                 </a:solidFill>
@@ -5972,8 +5980,8 @@
         </p:nvSpPr>
         <p:spPr bwMode="auto">
           <a:xfrm>
-            <a:off x="594360" y="1188720"/>
-            <a:ext cx="10972800" cy="4937760"/>
+            <a:off x="594360" y="1115568"/>
+            <a:ext cx="4892040" cy="5029200"/>
           </a:xfrm>
           <a:prstGeom prst="rect">
             <a:avLst/>
@@ -5994,16 +6002,15 @@
           <a:p>
             <a:pPr marL="342900" indent="-342900">
               <a:spcBef>
-                <a:spcPts val="500"/>
+                <a:spcPts val="400"/>
               </a:spcBef>
               <a:spcAft>
-                <a:spcPts val="200"/>
+                <a:spcPts val="100"/>
               </a:spcAft>
-              <a:buFont typeface="Wingdings" panose="05000000000000000000" pitchFamily="2" charset="2"/>
-              <a:buChar char="v"/>
+              <a:buNone/>
             </a:pPr>
             <a:r>
-              <a:rPr sz="1250" b="1">
+              <a:rPr sz="1150" b="1">
                 <a:solidFill>
                   <a:srgbClr val="14532D"/>
                 </a:solidFill>
@@ -6027,37 +6034,39 @@
               <a:spcAft>
                 <a:spcPts val="200"/>
               </a:spcAft>
+              <a:buNone/>
             </a:pPr>
             <a:r>
-              <a:rPr sz="1000" b="1">
+              <a:rPr sz="950" b="1">
                 <a:solidFill>
                   <a:srgbClr val="0F172A"/>
                 </a:solidFill>
                 <a:latin typeface="Arial"/>
               </a:rPr>
-              <a:t>• KrishiSmriti (AgriGPT) Decision Engine: </a:t>
-            </a:r>
-            <a:r>
-              <a:rPr sz="1000" b="0">
+              <a:t>• KrishiSmriti Decision Engine: </a:t>
+            </a:r>
+            <a:r>
+              <a:rPr sz="950" b="0">
                 <a:solidFill>
                   <a:srgbClr val="334155"/>
                 </a:solidFill>
                 <a:latin typeface="Arial"/>
               </a:rPr>
-              <a:t>An AI-powered 'Second Brain' for smallholder farmers that continuously synthesizes weather forecasts, 12-parameter soil health, mandi prices, and local labor into a single, daily decisive action plan.</a:t>
+              <a:t>An AI-powered 'Second Brain' for smallholder farmers synthesizing weather, 12-parameter soil health, mandi prices, and local labor into a single, daily decisive action plan.</a:t>
             </a:r>
           </a:p>
           <a:p>
             <a:pPr>
               <a:spcBef>
-                <a:spcPts val="500"/>
+                <a:spcPts val="400"/>
               </a:spcBef>
               <a:spcAft>
-                <a:spcPts val="200"/>
+                <a:spcPts val="100"/>
               </a:spcAft>
+              <a:buNone/>
             </a:pPr>
             <a:r>
-              <a:rPr sz="1250" b="1">
+              <a:rPr sz="1150" b="1">
                 <a:solidFill>
                   <a:srgbClr val="14532D"/>
                 </a:solidFill>
@@ -6074,9 +6083,10 @@
               <a:spcAft>
                 <a:spcPts val="200"/>
               </a:spcAft>
+              <a:buNone/>
             </a:pPr>
             <a:r>
-              <a:rPr sz="1000" b="1">
+              <a:rPr sz="950" b="1">
                 <a:solidFill>
                   <a:srgbClr val="0F172A"/>
                 </a:solidFill>
@@ -6085,13 +6095,13 @@
               <a:t>• 4-Layer Autonomous Architecture: </a:t>
             </a:r>
             <a:r>
-              <a:rPr sz="1000" b="0">
+              <a:rPr sz="950" b="0">
                 <a:solidFill>
                   <a:srgbClr val="334155"/>
                 </a:solidFill>
                 <a:latin typeface="Arial"/>
               </a:rPr>
-              <a:t>Separates multi-source telemetry ingestion from deterministic ICAR math guardrails, filtered vector RAG, and zero-touch vernacular voice delivery.</a:t>
+              <a:t>Separates multi-source telemetry ingestion from deterministic ICAR math guardrails, vector RAG, and vernacular voice delivery.</a:t>
             </a:r>
           </a:p>
           <a:p>
@@ -6102,9 +6112,10 @@
               <a:spcAft>
                 <a:spcPts val="200"/>
               </a:spcAft>
+              <a:buNone/>
             </a:pPr>
             <a:r>
-              <a:rPr sz="1000" b="1">
+              <a:rPr sz="950" b="1">
                 <a:solidFill>
                   <a:srgbClr val="0F172A"/>
                 </a:solidFill>
@@ -6113,13 +6124,33 @@
               <a:t>• 5 Parallel Telemetry APIs: </a:t>
             </a:r>
             <a:r>
-              <a:rPr sz="1000" b="0">
+              <a:rPr sz="950" b="0">
                 <a:solidFill>
                   <a:srgbClr val="334155"/>
                 </a:solidFill>
                 <a:latin typeface="Arial"/>
               </a:rPr>
-              <a:t>GPS pin triggers simultaneous calls to Open-Meteo, SoilGrids 250m ISRIC, Copernicus DEM Topography, Agmarknet Mandis, and Sentinel-1/2 SAR NDVI.</a:t>
+              <a:t>GPS pin triggers simultaneous calls to Open-Meteo, SoilGrids 250m, Copernicus DEM, Agmarknet, and Sentinel-1/2 SAR.</a:t>
+            </a:r>
+          </a:p>
+          <a:p>
+            <a:pPr>
+              <a:spcBef>
+                <a:spcPts val="400"/>
+              </a:spcBef>
+              <a:spcAft>
+                <a:spcPts val="100"/>
+              </a:spcAft>
+              <a:buNone/>
+            </a:pPr>
+            <a:r>
+              <a:rPr sz="1150" b="1">
+                <a:solidFill>
+                  <a:srgbClr val="14532D"/>
+                </a:solidFill>
+                <a:latin typeface="Arial"/>
+              </a:rPr>
+              <a:t>How it addresses the problem</a:t>
             </a:r>
           </a:p>
           <a:p>
@@ -6130,43 +6161,25 @@
               <a:spcAft>
                 <a:spcPts val="200"/>
               </a:spcAft>
+              <a:buNone/>
             </a:pPr>
             <a:r>
-              <a:rPr sz="1000" b="1">
+              <a:rPr sz="950" b="1">
                 <a:solidFill>
                   <a:srgbClr val="0F172A"/>
                 </a:solidFill>
                 <a:latin typeface="Arial"/>
               </a:rPr>
-              <a:t>• B2G / G2C Digital Public Infrastructure: </a:t>
-            </a:r>
-            <a:r>
-              <a:rPr sz="1000" b="0">
+              <a:t>• Eliminates Decision Blindness: </a:t>
+            </a:r>
+            <a:r>
+              <a:rPr sz="950" b="0">
                 <a:solidFill>
                   <a:srgbClr val="334155"/>
                 </a:solidFill>
                 <a:latin typeface="Arial"/>
               </a:rPr>
-              <a:t>Delivered free to smallholders by plugging directly into State Agriculture Departments, AgriStack Farmer ID, and Krishi-DSS.</a:t>
-            </a:r>
-          </a:p>
-          <a:p>
-            <a:pPr>
-              <a:spcBef>
-                <a:spcPts val="500"/>
-              </a:spcBef>
-              <a:spcAft>
-                <a:spcPts val="200"/>
-              </a:spcAft>
-            </a:pPr>
-            <a:r>
-              <a:rPr sz="1250" b="1">
-                <a:solidFill>
-                  <a:srgbClr val="14532D"/>
-                </a:solidFill>
-                <a:latin typeface="Arial"/>
-              </a:rPr>
-              <a:t>How it addresses the problem</a:t>
+              <a:t>Farmers rush to harvest on price spikes or over-spray in heat, losing ₹92,000 Cr in distress sales and ₹35,000 Cr in wasted fertilizers.</a:t>
             </a:r>
           </a:p>
           <a:p>
@@ -6177,24 +6190,45 @@
               <a:spcAft>
                 <a:spcPts val="200"/>
               </a:spcAft>
+              <a:buNone/>
             </a:pPr>
             <a:r>
-              <a:rPr sz="1000" b="1">
+              <a:rPr sz="950" b="1">
                 <a:solidFill>
                   <a:srgbClr val="0F172A"/>
                 </a:solidFill>
                 <a:latin typeface="Arial"/>
               </a:rPr>
-              <a:t>• Eliminates 'Decision Blindness &amp; Single-Variable Bias': </a:t>
-            </a:r>
-            <a:r>
-              <a:rPr sz="1000" b="0">
+              <a:t>• Unified Operational Context: </a:t>
+            </a:r>
+            <a:r>
+              <a:rPr sz="950" b="0">
                 <a:solidFill>
                   <a:srgbClr val="334155"/>
                 </a:solidFill>
                 <a:latin typeface="Arial"/>
               </a:rPr>
-              <a:t>Farmers rush to harvest on mandi price spikes ignoring incoming 24h storms, or over-spray expensive chemicals in extreme heat, losing ₹92,000 Crore annually in distress sales and ₹35,000 Crore in wasted fertilizers.</a:t>
+              <a:t>Resolves competing real-world trade-offs (rain probability + slope runoff + labor shortage) in the background.</a:t>
+            </a:r>
+          </a:p>
+          <a:p>
+            <a:pPr>
+              <a:spcBef>
+                <a:spcPts val="400"/>
+              </a:spcBef>
+              <a:spcAft>
+                <a:spcPts val="100"/>
+              </a:spcAft>
+              <a:buNone/>
+            </a:pPr>
+            <a:r>
+              <a:rPr sz="1150" b="1">
+                <a:solidFill>
+                  <a:srgbClr val="14532D"/>
+                </a:solidFill>
+                <a:latin typeface="Arial"/>
+              </a:rPr>
+              <a:t>Innovation and uniqueness of the solution</a:t>
             </a:r>
           </a:p>
           <a:p>
@@ -6205,43 +6239,25 @@
               <a:spcAft>
                 <a:spcPts val="200"/>
               </a:spcAft>
+              <a:buNone/>
             </a:pPr>
             <a:r>
-              <a:rPr sz="1000" b="1">
+              <a:rPr sz="950" b="1">
                 <a:solidFill>
                   <a:srgbClr val="0F172A"/>
                 </a:solidFill>
                 <a:latin typeface="Arial"/>
               </a:rPr>
-              <a:t>• Unified Operational Context: </a:t>
-            </a:r>
-            <a:r>
-              <a:rPr sz="1000" b="0">
+              <a:t>• Zero-Hallucination ICAR Math Engine: </a:t>
+            </a:r>
+            <a:r>
+              <a:rPr sz="950" b="0">
                 <a:solidFill>
                   <a:srgbClr val="334155"/>
                 </a:solidFill>
                 <a:latin typeface="Arial"/>
               </a:rPr>
-              <a:t>Resolves competing real-world trade-offs (rain probability + steep slope runoff + local labor shortages) in the background.</a:t>
-            </a:r>
-          </a:p>
-          <a:p>
-            <a:pPr>
-              <a:spcBef>
-                <a:spcPts val="500"/>
-              </a:spcBef>
-              <a:spcAft>
-                <a:spcPts val="200"/>
-              </a:spcAft>
-            </a:pPr>
-            <a:r>
-              <a:rPr sz="1250" b="1">
-                <a:solidFill>
-                  <a:srgbClr val="14532D"/>
-                </a:solidFill>
-                <a:latin typeface="Arial"/>
-              </a:rPr>
-              <a:t>Innovation and uniqueness of the solution</a:t>
+              <a:t>LLMs barred from math; fertilizer dosing calculated by ICAR formulas with CIBRC 15-20 kg/acre caps.</a:t>
             </a:r>
           </a:p>
           <a:p>
@@ -6252,52 +6268,25 @@
               <a:spcAft>
                 <a:spcPts val="200"/>
               </a:spcAft>
+              <a:buNone/>
             </a:pPr>
             <a:r>
-              <a:rPr sz="1000" b="1">
+              <a:rPr sz="950" b="1">
                 <a:solidFill>
                   <a:srgbClr val="0F172A"/>
                 </a:solidFill>
                 <a:latin typeface="Arial"/>
               </a:rPr>
-              <a:t>• Zero-Hallucination ICAR Math Engine: </a:t>
-            </a:r>
-            <a:r>
-              <a:rPr sz="1000" b="0">
+              <a:t>• Predictive Labor Demand Smoothing: </a:t>
+            </a:r>
+            <a:r>
+              <a:rPr sz="950" b="0">
                 <a:solidFill>
                   <a:srgbClr val="334155"/>
                 </a:solidFill>
                 <a:latin typeface="Arial"/>
               </a:rPr>
-              <a:t>LLMs are barred from mathematical computation; fertilizer dosage is calculated strictly by ICAR formulas with CIBRC 15-20 kg caps.</a:t>
-            </a:r>
-          </a:p>
-          <a:p>
-            <a:pPr>
-              <a:spcBef>
-                <a:spcPts val="100"/>
-              </a:spcBef>
-              <a:spcAft>
-                <a:spcPts val="200"/>
-              </a:spcAft>
-            </a:pPr>
-            <a:r>
-              <a:rPr sz="1000" b="1">
-                <a:solidFill>
-                  <a:srgbClr val="0F172A"/>
-                </a:solidFill>
-                <a:latin typeface="Arial"/>
-              </a:rPr>
-              <a:t>• Predictive Labor Demand Smoothing: </a:t>
-            </a:r>
-            <a:r>
-              <a:rPr sz="1000" b="0">
-                <a:solidFill>
-                  <a:srgbClr val="334155"/>
-                </a:solidFill>
-                <a:latin typeface="Arial"/>
-              </a:rPr>
-              <a:t>Staggers village-level harvest windows to match local Custom Hiring Centre (CHC) machinery during labor crunches.</a:t>
+              <a:t>Staggers village harvest windows to match local Custom Hiring Centre (CHC) machinery fleets.</a:t>
             </a:r>
           </a:p>
         </p:txBody>
@@ -6415,11 +6404,13 @@
           <a:bodyPr rtlCol="0" anchor="ctr"/>
           <a:lstStyle/>
           <a:p>
-            <a:pPr algn="ctr"/>
-            <a:r>
-              <a:rPr sz="1100" b="1">
-                <a:solidFill>
-                  <a:srgbClr val="FFFFFF"/>
+            <a:pPr algn="ctr">
+              <a:buNone/>
+            </a:pPr>
+            <a:r>
+              <a:rPr sz="1050" b="1">
+                <a:solidFill>
+                  <a:srgbClr val="14532D"/>
                 </a:solidFill>
                 <a:latin typeface="Arial"/>
               </a:rPr>
@@ -6453,6 +6444,30 @@
           <a:xfrm>
             <a:off x="9780086" y="1500"/>
             <a:ext cx="2249850" cy="1062337"/>
+          </a:xfrm>
+          <a:prstGeom prst="rect">
+            <a:avLst/>
+          </a:prstGeom>
+        </p:spPr>
+      </p:pic>
+      <p:pic>
+        <p:nvPicPr>
+          <p:cNvPr id="15363" name="Picture 15362" descr="agrigpt_concept_infographic.jpg"/>
+          <p:cNvPicPr>
+            <a:picLocks noChangeAspect="1"/>
+          </p:cNvPicPr>
+          <p:nvPr/>
+        </p:nvPicPr>
+        <p:blipFill>
+          <a:blip r:embed="rId4"/>
+          <a:stretch>
+            <a:fillRect/>
+          </a:stretch>
+        </p:blipFill>
+        <p:spPr>
+          <a:xfrm>
+            <a:off x="5623560" y="1234440"/>
+            <a:ext cx="6080760" cy="4526280"/>
           </a:xfrm>
           <a:prstGeom prst="rect">
             <a:avLst/>
@@ -6558,14 +6573,21 @@
             <p:ph type="title"/>
           </p:nvPr>
         </p:nvSpPr>
-        <p:spPr/>
-        <p:txBody>
-          <a:bodyPr/>
+        <p:spPr>
+          <a:xfrm>
+            <a:off x="1691640" y="164592"/>
+            <a:ext cx="7955279" cy="868680"/>
+          </a:xfrm>
+        </p:spPr>
+        <p:txBody>
+          <a:bodyPr wrap="square"/>
           <a:lstStyle/>
           <a:p>
-            <a:pPr eaLnBrk="1" hangingPunct="1"/>
-            <a:r>
-              <a:rPr sz="2300" b="1">
+            <a:pPr eaLnBrk="1" hangingPunct="1" algn="l">
+              <a:buNone/>
+            </a:pPr>
+            <a:r>
+              <a:rPr sz="1900" b="1">
                 <a:solidFill>
                   <a:srgbClr val="14532D"/>
                 </a:solidFill>
@@ -6586,8 +6608,8 @@
         </p:nvSpPr>
         <p:spPr bwMode="auto">
           <a:xfrm>
-            <a:off x="594360" y="1143000"/>
-            <a:ext cx="10972800" cy="1280160"/>
+            <a:off x="594360" y="1078992"/>
+            <a:ext cx="10972800" cy="1234440"/>
           </a:xfrm>
           <a:prstGeom prst="rect">
             <a:avLst/>
@@ -6611,13 +6633,12 @@
                 <a:spcPts val="300"/>
               </a:spcBef>
               <a:spcAft>
-                <a:spcPts val="200"/>
+                <a:spcPts val="100"/>
               </a:spcAft>
-              <a:buFont typeface="Arial" panose="020B0604020202020204" pitchFamily="34" charset="0"/>
-              <a:buChar char="•"/>
+              <a:buNone/>
             </a:pPr>
             <a:r>
-              <a:rPr sz="1200" b="1">
+              <a:rPr sz="1100" b="1">
                 <a:solidFill>
                   <a:srgbClr val="14532D"/>
                 </a:solidFill>
@@ -6632,8 +6653,9 @@
                 <a:spcPts val="100"/>
               </a:spcBef>
               <a:spcAft>
-                <a:spcPts val="200"/>
+                <a:spcPts val="100"/>
               </a:spcAft>
+              <a:buNone/>
             </a:pPr>
             <a:r>
               <a:rPr sz="950" b="1">
@@ -6660,8 +6682,9 @@
                 <a:spcPts val="100"/>
               </a:spcBef>
               <a:spcAft>
-                <a:spcPts val="200"/>
+                <a:spcPts val="100"/>
               </a:spcAft>
+              <a:buNone/>
             </a:pPr>
             <a:r>
               <a:rPr sz="950" b="1">
@@ -6688,11 +6711,12 @@
                 <a:spcPts val="300"/>
               </a:spcBef>
               <a:spcAft>
-                <a:spcPts val="200"/>
+                <a:spcPts val="100"/>
               </a:spcAft>
+              <a:buNone/>
             </a:pPr>
             <a:r>
-              <a:rPr sz="1200" b="1">
+              <a:rPr sz="1100" b="1">
                 <a:solidFill>
                   <a:srgbClr val="14532D"/>
                 </a:solidFill>
@@ -6707,8 +6731,9 @@
                 <a:spcPts val="100"/>
               </a:spcBef>
               <a:spcAft>
-                <a:spcPts val="200"/>
+                <a:spcPts val="100"/>
               </a:spcAft>
+              <a:buNone/>
             </a:pPr>
             <a:r>
               <a:rPr sz="950" b="1">
@@ -6844,11 +6869,13 @@
           <a:bodyPr rtlCol="0" anchor="ctr"/>
           <a:lstStyle/>
           <a:p>
-            <a:pPr algn="ctr"/>
-            <a:r>
-              <a:rPr sz="1100" b="1">
-                <a:solidFill>
-                  <a:srgbClr val="FFFFFF"/>
+            <a:pPr algn="ctr">
+              <a:buNone/>
+            </a:pPr>
+            <a:r>
+              <a:rPr sz="1050" b="1">
+                <a:solidFill>
+                  <a:srgbClr val="14532D"/>
                 </a:solidFill>
                 <a:latin typeface="Arial"/>
               </a:rPr>
@@ -6904,8 +6931,8 @@
         </p:blipFill>
         <p:spPr>
           <a:xfrm>
-            <a:off x="640080" y="2450592"/>
-            <a:ext cx="10881360" cy="3703320"/>
+            <a:off x="640080" y="2377440"/>
+            <a:ext cx="10908792" cy="3840480"/>
           </a:xfrm>
           <a:prstGeom prst="rect">
             <a:avLst/>
@@ -7026,14 +7053,21 @@
             <p:ph type="title"/>
           </p:nvPr>
         </p:nvSpPr>
-        <p:spPr/>
-        <p:txBody>
-          <a:bodyPr/>
+        <p:spPr>
+          <a:xfrm>
+            <a:off x="1691640" y="164592"/>
+            <a:ext cx="7955279" cy="868680"/>
+          </a:xfrm>
+        </p:spPr>
+        <p:txBody>
+          <a:bodyPr wrap="square"/>
           <a:lstStyle/>
           <a:p>
-            <a:pPr eaLnBrk="1" hangingPunct="1"/>
-            <a:r>
-              <a:rPr sz="2300" b="1">
+            <a:pPr eaLnBrk="1" hangingPunct="1" algn="l">
+              <a:buNone/>
+            </a:pPr>
+            <a:r>
+              <a:rPr sz="1900" b="1">
                 <a:solidFill>
                   <a:srgbClr val="14532D"/>
                 </a:solidFill>
@@ -7054,8 +7088,8 @@
         </p:nvSpPr>
         <p:spPr bwMode="auto">
           <a:xfrm>
-            <a:off x="594360" y="1188720"/>
-            <a:ext cx="10972800" cy="4937760"/>
+            <a:off x="594360" y="1078992"/>
+            <a:ext cx="10972800" cy="1234440"/>
           </a:xfrm>
           <a:prstGeom prst="rect">
             <a:avLst/>
@@ -7079,20 +7113,19 @@
                 <a:spcPct val="100000"/>
               </a:lnSpc>
               <a:spcBef>
-                <a:spcPts val="500"/>
+                <a:spcPts val="300"/>
               </a:spcBef>
               <a:spcAft>
-                <a:spcPts val="200"/>
+                <a:spcPts val="100"/>
               </a:spcAft>
               <a:buClrTx/>
               <a:buSzTx/>
-              <a:buFont typeface="Arial" panose="020B0604020202020204" pitchFamily="34" charset="0"/>
-              <a:buChar char="•"/>
               <a:tabLst/>
               <a:defRPr/>
+              <a:buNone/>
             </a:pPr>
             <a:r>
-              <a:rPr sz="1250" b="1">
+              <a:rPr sz="1100" b="1">
                 <a:solidFill>
                   <a:srgbClr val="14532D"/>
                 </a:solidFill>
@@ -7121,11 +7154,12 @@
                 <a:spcPts val="100"/>
               </a:spcBef>
               <a:spcAft>
-                <a:spcPts val="200"/>
+                <a:spcPts val="100"/>
               </a:spcAft>
+              <a:buNone/>
             </a:pPr>
             <a:r>
-              <a:rPr sz="1000" b="1">
+              <a:rPr sz="950" b="1">
                 <a:solidFill>
                   <a:srgbClr val="0F172A"/>
                 </a:solidFill>
@@ -7134,13 +7168,33 @@
               <a:t>• B2G Public Digital Infrastructure Model: </a:t>
             </a:r>
             <a:r>
-              <a:rPr sz="1000" b="0">
+              <a:rPr sz="950" b="0">
                 <a:solidFill>
                   <a:srgbClr val="334155"/>
                 </a:solidFill>
                 <a:latin typeface="Arial"/>
               </a:rPr>
-              <a:t>Zero subscription fees for poor farmers. Deployed via State Agriculture Departments under Digital Agriculture Mission grants.</a:t>
+              <a:t>Zero subscription fees for poor farmers. Deployed via State Agriculture Departments under Digital Agriculture Mission grants (AgriStack + Krishi-DSS).</a:t>
+            </a:r>
+          </a:p>
+          <a:p>
+            <a:pPr>
+              <a:spcBef>
+                <a:spcPts val="300"/>
+              </a:spcBef>
+              <a:spcAft>
+                <a:spcPts val="100"/>
+              </a:spcAft>
+              <a:buNone/>
+            </a:pPr>
+            <a:r>
+              <a:rPr sz="1100" b="1">
+                <a:solidFill>
+                  <a:srgbClr val="14532D"/>
+                </a:solidFill>
+                <a:latin typeface="Arial"/>
+              </a:rPr>
+              <a:t>Potential challenges and risks &amp; Strategies for overcoming these challenges</a:t>
             </a:r>
           </a:p>
           <a:p>
@@ -7149,288 +7203,27 @@
                 <a:spcPts val="100"/>
               </a:spcBef>
               <a:spcAft>
-                <a:spcPts val="200"/>
+                <a:spcPts val="100"/>
               </a:spcAft>
+              <a:buNone/>
             </a:pPr>
             <a:r>
-              <a:rPr sz="1000" b="1">
+              <a:rPr sz="950" b="1">
                 <a:solidFill>
                   <a:srgbClr val="0F172A"/>
                 </a:solidFill>
                 <a:latin typeface="Arial"/>
               </a:rPr>
-              <a:t>• AgriStack &amp; Krishi-DSS Interoperability: </a:t>
-            </a:r>
-            <a:r>
-              <a:rPr sz="1000" b="0">
+              <a:t>• 4-Point Engineering Safeguards: </a:t>
+            </a:r>
+            <a:r>
+              <a:rPr sz="950" b="0">
                 <a:solidFill>
                   <a:srgbClr val="334155"/>
                 </a:solidFill>
                 <a:latin typeface="Arial"/>
               </a:rPr>
-              <a:t>Plugs into government Farmer ID registry, pre-filling plot boundaries, ownership, and baseline soil history without manual setup.</a:t>
-            </a:r>
-          </a:p>
-          <a:p>
-            <a:pPr>
-              <a:spcBef>
-                <a:spcPts val="500"/>
-              </a:spcBef>
-              <a:spcAft>
-                <a:spcPts val="200"/>
-              </a:spcAft>
-            </a:pPr>
-            <a:r>
-              <a:rPr sz="1250" b="1">
-                <a:solidFill>
-                  <a:srgbClr val="14532D"/>
-                </a:solidFill>
-                <a:latin typeface="Arial"/>
-              </a:rPr>
-              <a:t>Potential challenges and risks</a:t>
-            </a:r>
-          </a:p>
-          <a:p>
-            <a:pPr>
-              <a:spcBef>
-                <a:spcPts val="100"/>
-              </a:spcBef>
-              <a:spcAft>
-                <a:spcPts val="200"/>
-              </a:spcAft>
-            </a:pPr>
-            <a:r>
-              <a:rPr sz="1000" b="1">
-                <a:solidFill>
-                  <a:srgbClr val="0F172A"/>
-                </a:solidFill>
-                <a:latin typeface="Arial"/>
-              </a:rPr>
-              <a:t>• 1. Catastrophic Fertilizer Overdosing: </a:t>
-            </a:r>
-            <a:r>
-              <a:rPr sz="1000" b="0">
-                <a:solidFill>
-                  <a:srgbClr val="334155"/>
-                </a:solidFill>
-                <a:latin typeface="Arial"/>
-              </a:rPr>
-              <a:t>A hallucinated chemical dosage recommendation from standard LLMs could destroy standing crops and cause bankruptcy.</a:t>
-            </a:r>
-          </a:p>
-          <a:p>
-            <a:pPr>
-              <a:spcBef>
-                <a:spcPts val="100"/>
-              </a:spcBef>
-              <a:spcAft>
-                <a:spcPts val="200"/>
-              </a:spcAft>
-            </a:pPr>
-            <a:r>
-              <a:rPr sz="1000" b="1">
-                <a:solidFill>
-                  <a:srgbClr val="0F172A"/>
-                </a:solidFill>
-                <a:latin typeface="Arial"/>
-              </a:rPr>
-              <a:t>• 2. Digital Illiteracy &amp; Text Barrier: </a:t>
-            </a:r>
-            <a:r>
-              <a:rPr sz="1000" b="0">
-                <a:solidFill>
-                  <a:srgbClr val="334155"/>
-                </a:solidFill>
-                <a:latin typeface="Arial"/>
-              </a:rPr>
-              <a:t>Traditional apps with complex drop-downs, search bars, and English text fail completely with rural smallholders.</a:t>
-            </a:r>
-          </a:p>
-          <a:p>
-            <a:pPr>
-              <a:spcBef>
-                <a:spcPts val="100"/>
-              </a:spcBef>
-              <a:spcAft>
-                <a:spcPts val="200"/>
-              </a:spcAft>
-            </a:pPr>
-            <a:r>
-              <a:rPr sz="1000" b="1">
-                <a:solidFill>
-                  <a:srgbClr val="0F172A"/>
-                </a:solidFill>
-                <a:latin typeface="Arial"/>
-              </a:rPr>
-              <a:t>• 3. Rural Connectivity Dropouts: </a:t>
-            </a:r>
-            <a:r>
-              <a:rPr sz="1000" b="0">
-                <a:solidFill>
-                  <a:srgbClr val="334155"/>
-                </a:solidFill>
-                <a:latin typeface="Arial"/>
-              </a:rPr>
-              <a:t>Remote farm fields frequently experience 2G/3G connectivity loss during critical sowing and spraying cycles.</a:t>
-            </a:r>
-          </a:p>
-          <a:p>
-            <a:pPr>
-              <a:spcBef>
-                <a:spcPts val="100"/>
-              </a:spcBef>
-              <a:spcAft>
-                <a:spcPts val="200"/>
-              </a:spcAft>
-            </a:pPr>
-            <a:r>
-              <a:rPr sz="1000" b="1">
-                <a:solidFill>
-                  <a:srgbClr val="0F172A"/>
-                </a:solidFill>
-                <a:latin typeface="Arial"/>
-              </a:rPr>
-              <a:t>• 4. Commercial Conflict of Interest: </a:t>
-            </a:r>
-            <a:r>
-              <a:rPr sz="1000" b="0">
-                <a:solidFill>
-                  <a:srgbClr val="334155"/>
-                </a:solidFill>
-                <a:latin typeface="Arial"/>
-              </a:rPr>
-              <a:t>Private ag-tech platforms make profits by selling chemicals, creating a perverse bias toward promoting heavy pesticide usage.</a:t>
-            </a:r>
-          </a:p>
-          <a:p>
-            <a:pPr>
-              <a:spcBef>
-                <a:spcPts val="500"/>
-              </a:spcBef>
-              <a:spcAft>
-                <a:spcPts val="200"/>
-              </a:spcAft>
-            </a:pPr>
-            <a:r>
-              <a:rPr sz="1250" b="1">
-                <a:solidFill>
-                  <a:srgbClr val="14532D"/>
-                </a:solidFill>
-                <a:latin typeface="Arial"/>
-              </a:rPr>
-              <a:t>Strategies for overcoming these challenges</a:t>
-            </a:r>
-          </a:p>
-          <a:p>
-            <a:pPr>
-              <a:spcBef>
-                <a:spcPts val="100"/>
-              </a:spcBef>
-              <a:spcAft>
-                <a:spcPts val="200"/>
-              </a:spcAft>
-            </a:pPr>
-            <a:r>
-              <a:rPr sz="1000" b="1">
-                <a:solidFill>
-                  <a:srgbClr val="0F172A"/>
-                </a:solidFill>
-                <a:latin typeface="Arial"/>
-              </a:rPr>
-              <a:t>• 1. Strict Code-Level Isolation (Math vs Language): </a:t>
-            </a:r>
-            <a:r>
-              <a:rPr sz="1000" b="0">
-                <a:solidFill>
-                  <a:srgbClr val="334155"/>
-                </a:solidFill>
-                <a:latin typeface="Arial"/>
-              </a:rPr>
-              <a:t>ICAR verified Python formulas enforce hard dosage bounds (e.g. max 15-20 kg Urea/acre single split).</a:t>
-            </a:r>
-          </a:p>
-          <a:p>
-            <a:pPr>
-              <a:spcBef>
-                <a:spcPts val="100"/>
-              </a:spcBef>
-              <a:spcAft>
-                <a:spcPts val="200"/>
-              </a:spcAft>
-            </a:pPr>
-            <a:r>
-              <a:rPr sz="1000" b="1">
-                <a:solidFill>
-                  <a:srgbClr val="0F172A"/>
-                </a:solidFill>
-                <a:latin typeface="Arial"/>
-              </a:rPr>
-              <a:t>• 2. Zero-Form Iconographic &amp; Voice UI: </a:t>
-            </a:r>
-            <a:r>
-              <a:rPr sz="1000" b="0">
-                <a:solidFill>
-                  <a:srgbClr val="334155"/>
-                </a:solidFill>
-                <a:latin typeface="Arial"/>
-              </a:rPr>
-              <a:t>Touchable visual cards (Kali/Laal Mitti, crop growth phases) + one-button Bhashini audio interaction.</a:t>
-            </a:r>
-          </a:p>
-          <a:p>
-            <a:pPr>
-              <a:spcBef>
-                <a:spcPts val="100"/>
-              </a:spcBef>
-              <a:spcAft>
-                <a:spcPts val="200"/>
-              </a:spcAft>
-            </a:pPr>
-            <a:r>
-              <a:rPr sz="1000" b="1">
-                <a:solidFill>
-                  <a:srgbClr val="0F172A"/>
-                </a:solidFill>
-                <a:latin typeface="Arial"/>
-              </a:rPr>
-              <a:t>• 3. Offline-First PWA Edge Caching: </a:t>
-            </a:r>
-            <a:r>
-              <a:rPr sz="1000" b="0">
-                <a:solidFill>
-                  <a:srgbClr val="334155"/>
-                </a:solidFill>
-                <a:latin typeface="Arial"/>
-              </a:rPr>
-              <a:t>Core agronomy calculators and regional crop calendars are saved locally on device via SQLite.</a:t>
-            </a:r>
-          </a:p>
-          <a:p>
-            <a:pPr>
-              <a:spcBef>
-                <a:spcPts val="100"/>
-              </a:spcBef>
-              <a:spcAft>
-                <a:spcPts val="200"/>
-              </a:spcAft>
-            </a:pPr>
-            <a:r>
-              <a:rPr sz="1000" b="1">
-                <a:solidFill>
-                  <a:srgbClr val="0F172A"/>
-                </a:solidFill>
-                <a:latin typeface="Arial"/>
-              </a:rPr>
-              <a:t>• 4. Vendor-Neutral Public Utility: </a:t>
-            </a:r>
-            <a:r>
-              <a:rPr sz="1000" b="0">
-                <a:solidFill>
-                  <a:srgbClr val="334155"/>
-                </a:solidFill>
-                <a:latin typeface="Arial"/>
-              </a:rPr>
-              <a:t>Unbiased operational guidance frequently instructs farmers NOT to buy or spray chemicals when weather makes them ineffective.</a:t>
+              <a:t>ICAR hardcoded formulas stop chemical overdose; visual cards bypass illiteracy; SQLite edge cache solves offline fields; vendor-neutral model eliminates sales bias.</a:t>
             </a:r>
           </a:p>
         </p:txBody>
@@ -7631,11 +7424,13 @@
           <a:bodyPr rtlCol="0" anchor="ctr"/>
           <a:lstStyle/>
           <a:p>
-            <a:pPr algn="ctr"/>
-            <a:r>
-              <a:rPr sz="1100" b="1">
-                <a:solidFill>
-                  <a:srgbClr val="FFFFFF"/>
+            <a:pPr algn="ctr">
+              <a:buNone/>
+            </a:pPr>
+            <a:r>
+              <a:rPr sz="1050" b="1">
+                <a:solidFill>
+                  <a:srgbClr val="14532D"/>
                 </a:solidFill>
                 <a:latin typeface="Arial"/>
               </a:rPr>
@@ -7669,6 +7464,30 @@
           <a:xfrm>
             <a:off x="9780086" y="1500"/>
             <a:ext cx="2249850" cy="1062337"/>
+          </a:xfrm>
+          <a:prstGeom prst="rect">
+            <a:avLst/>
+          </a:prstGeom>
+        </p:spPr>
+      </p:pic>
+      <p:pic>
+        <p:nvPicPr>
+          <p:cNvPr id="17411" name="Picture 17410" descr="krishismriti_safeguards_diagram.png"/>
+          <p:cNvPicPr>
+            <a:picLocks noChangeAspect="1"/>
+          </p:cNvPicPr>
+          <p:nvPr/>
+        </p:nvPicPr>
+        <p:blipFill>
+          <a:blip r:embed="rId4"/>
+          <a:stretch>
+            <a:fillRect/>
+          </a:stretch>
+        </p:blipFill>
+        <p:spPr>
+          <a:xfrm>
+            <a:off x="640080" y="2377440"/>
+            <a:ext cx="10908792" cy="3840480"/>
           </a:xfrm>
           <a:prstGeom prst="rect">
             <a:avLst/>
@@ -7794,14 +7613,21 @@
             <p:ph type="title"/>
           </p:nvPr>
         </p:nvSpPr>
-        <p:spPr/>
-        <p:txBody>
-          <a:bodyPr/>
+        <p:spPr>
+          <a:xfrm>
+            <a:off x="1691640" y="164592"/>
+            <a:ext cx="7955279" cy="868680"/>
+          </a:xfrm>
+        </p:spPr>
+        <p:txBody>
+          <a:bodyPr wrap="square"/>
           <a:lstStyle/>
           <a:p>
-            <a:pPr eaLnBrk="1" hangingPunct="1"/>
-            <a:r>
-              <a:rPr sz="2300" b="1">
+            <a:pPr eaLnBrk="1" hangingPunct="1" algn="l">
+              <a:buNone/>
+            </a:pPr>
+            <a:r>
+              <a:rPr sz="1900" b="1">
                 <a:solidFill>
                   <a:srgbClr val="14532D"/>
                 </a:solidFill>
@@ -7822,8 +7648,8 @@
         </p:nvSpPr>
         <p:spPr bwMode="auto">
           <a:xfrm>
-            <a:off x="594360" y="1188720"/>
-            <a:ext cx="10972800" cy="4937760"/>
+            <a:off x="594360" y="1115568"/>
+            <a:ext cx="4892040" cy="5029200"/>
           </a:xfrm>
           <a:prstGeom prst="rect">
             <a:avLst/>
@@ -7847,20 +7673,19 @@
                 <a:spcPct val="100000"/>
               </a:lnSpc>
               <a:spcBef>
-                <a:spcPts val="500"/>
+                <a:spcPts val="400"/>
               </a:spcBef>
               <a:spcAft>
-                <a:spcPts val="200"/>
+                <a:spcPts val="100"/>
               </a:spcAft>
               <a:buClrTx/>
               <a:buSzTx/>
-              <a:buFont typeface="Arial" panose="020B0604020202020204" pitchFamily="34" charset="0"/>
-              <a:buChar char="•"/>
               <a:tabLst/>
               <a:defRPr/>
+              <a:buNone/>
             </a:pPr>
             <a:r>
-              <a:rPr sz="1250" b="1">
+              <a:rPr sz="1150" b="1">
                 <a:solidFill>
                   <a:srgbClr val="14532D"/>
                 </a:solidFill>
@@ -7877,9 +7702,10 @@
               <a:spcAft>
                 <a:spcPts val="200"/>
               </a:spcAft>
+              <a:buNone/>
             </a:pPr>
             <a:r>
-              <a:rPr sz="1000" b="1">
+              <a:rPr sz="950" b="1">
                 <a:solidFill>
                   <a:srgbClr val="0F172A"/>
                 </a:solidFill>
@@ -7888,7 +7714,7 @@
               <a:t>• 140 Million Smallholders: </a:t>
             </a:r>
             <a:r>
-              <a:rPr sz="1000" b="0">
+              <a:rPr sz="950" b="0">
                 <a:solidFill>
                   <a:srgbClr val="334155"/>
                 </a:solidFill>
@@ -7905,9 +7731,10 @@
               <a:spcAft>
                 <a:spcPts val="200"/>
               </a:spcAft>
+              <a:buNone/>
             </a:pPr>
             <a:r>
-              <a:rPr sz="1000" b="1">
+              <a:rPr sz="950" b="1">
                 <a:solidFill>
                   <a:srgbClr val="0F172A"/>
                 </a:solidFill>
@@ -7916,13 +7743,13 @@
               <a:t>• Agricultural Extension Officers (Krishi Sakhis): </a:t>
             </a:r>
             <a:r>
-              <a:rPr sz="1000" b="0">
+              <a:rPr sz="950" b="0">
                 <a:solidFill>
                   <a:srgbClr val="334155"/>
                 </a:solidFill>
                 <a:latin typeface="Arial"/>
               </a:rPr>
-              <a:t>Overcomes India's 1:1,500 extension worker deficit by providing field workers with a 24/7 AI advisory co-pilot on tablets.</a:t>
+              <a:t>Overcomes India's 1:1,500 extension worker deficit with 24/7 AI co-pilot on tablets.</a:t>
             </a:r>
           </a:p>
           <a:p>
@@ -7933,9 +7760,10 @@
               <a:spcAft>
                 <a:spcPts val="200"/>
               </a:spcAft>
+              <a:buNone/>
             </a:pPr>
             <a:r>
-              <a:rPr sz="1000" b="1">
+              <a:rPr sz="950" b="1">
                 <a:solidFill>
                   <a:srgbClr val="0F172A"/>
                 </a:solidFill>
@@ -7944,13 +7772,33 @@
               <a:t>• Custom Hiring Centres (CHCs): </a:t>
             </a:r>
             <a:r>
-              <a:rPr sz="1000" b="0">
+              <a:rPr sz="950" b="0">
                 <a:solidFill>
                   <a:srgbClr val="334155"/>
                 </a:solidFill>
                 <a:latin typeface="Arial"/>
               </a:rPr>
-              <a:t>Optimizes local tractor and combined harvester fleet utilization through pooled village-level schedule aggregation.</a:t>
+              <a:t>Optimizes tractor and harvester fleet utilization through pooled village-level schedule aggregation.</a:t>
+            </a:r>
+          </a:p>
+          <a:p>
+            <a:pPr>
+              <a:spcBef>
+                <a:spcPts val="400"/>
+              </a:spcBef>
+              <a:spcAft>
+                <a:spcPts val="100"/>
+              </a:spcAft>
+              <a:buNone/>
+            </a:pPr>
+            <a:r>
+              <a:rPr sz="1150" b="1">
+                <a:solidFill>
+                  <a:srgbClr val="14532D"/>
+                </a:solidFill>
+                <a:latin typeface="Arial"/>
+              </a:rPr>
+              <a:t>Benefits of the solution (social, economic, environmental, etc.)</a:t>
             </a:r>
           </a:p>
           <a:p>
@@ -7961,43 +7809,25 @@
               <a:spcAft>
                 <a:spcPts val="200"/>
               </a:spcAft>
+              <a:buNone/>
             </a:pPr>
             <a:r>
-              <a:rPr sz="1000" b="1">
+              <a:rPr sz="950" b="1">
                 <a:solidFill>
                   <a:srgbClr val="0F172A"/>
                 </a:solidFill>
                 <a:latin typeface="Arial"/>
               </a:rPr>
-              <a:t>• Policy Makers &amp; State Departments: </a:t>
-            </a:r>
-            <a:r>
-              <a:rPr sz="1000" b="0">
+              <a:t>• Economic Viability: </a:t>
+            </a:r>
+            <a:r>
+              <a:rPr sz="950" b="0">
                 <a:solidFill>
                   <a:srgbClr val="334155"/>
                 </a:solidFill>
                 <a:latin typeface="Arial"/>
               </a:rPr>
-              <a:t>Aggregated, anonymized telemetry delivers real-time crisis data on pest outbreaks and regional crop distress.</a:t>
-            </a:r>
-          </a:p>
-          <a:p>
-            <a:pPr>
-              <a:spcBef>
-                <a:spcPts val="500"/>
-              </a:spcBef>
-              <a:spcAft>
-                <a:spcPts val="200"/>
-              </a:spcAft>
-            </a:pPr>
-            <a:r>
-              <a:rPr sz="1250" b="1">
-                <a:solidFill>
-                  <a:srgbClr val="14532D"/>
-                </a:solidFill>
-                <a:latin typeface="Arial"/>
-              </a:rPr>
-              <a:t>Benefits of the solution (social, economic, environmental, etc.)</a:t>
+              <a:t>Directly curbs ₹50,000–₹90,000 Cr in market timing losses and ₹25,000–₹35,000 Cr in misapplied chemicals.</a:t>
             </a:r>
           </a:p>
           <a:p>
@@ -8008,24 +7838,25 @@
               <a:spcAft>
                 <a:spcPts val="200"/>
               </a:spcAft>
+              <a:buNone/>
             </a:pPr>
             <a:r>
-              <a:rPr sz="1000" b="1">
+              <a:rPr sz="950" b="1">
                 <a:solidFill>
                   <a:srgbClr val="0F172A"/>
                 </a:solidFill>
                 <a:latin typeface="Arial"/>
               </a:rPr>
-              <a:t>• Economic Viability: </a:t>
-            </a:r>
-            <a:r>
-              <a:rPr sz="1000" b="0">
+              <a:t>• Social Equity: </a:t>
+            </a:r>
+            <a:r>
+              <a:rPr sz="950" b="0">
                 <a:solidFill>
                   <a:srgbClr val="334155"/>
                 </a:solidFill>
                 <a:latin typeface="Arial"/>
               </a:rPr>
-              <a:t>Directly curbs ₹50,000–₹90,000 Cr in market timing losses and ₹25,000–₹35,000 Cr in misapplied agro-chemical expenditures.</a:t>
+              <a:t>Full vernacular accessibility across 22 official languages and colloquial dialects (Varhadi Marathi, Bundelkhandi, Malwi).</a:t>
             </a:r>
           </a:p>
           <a:p>
@@ -8036,46 +7867,19 @@
               <a:spcAft>
                 <a:spcPts val="200"/>
               </a:spcAft>
+              <a:buNone/>
             </a:pPr>
             <a:r>
-              <a:rPr sz="1000" b="1">
+              <a:rPr sz="950" b="1">
                 <a:solidFill>
                   <a:srgbClr val="0F172A"/>
                 </a:solidFill>
                 <a:latin typeface="Arial"/>
               </a:rPr>
-              <a:t>• Social Equity: </a:t>
-            </a:r>
-            <a:r>
-              <a:rPr sz="1000" b="0">
-                <a:solidFill>
-                  <a:srgbClr val="334155"/>
-                </a:solidFill>
-                <a:latin typeface="Arial"/>
-              </a:rPr>
-              <a:t>Full vernacular accessibility across 22 official languages and colloquial dialects (Varhadi Marathi, Bundelkhandi, Malwi).</a:t>
-            </a:r>
-          </a:p>
-          <a:p>
-            <a:pPr>
-              <a:spcBef>
-                <a:spcPts val="100"/>
-              </a:spcBef>
-              <a:spcAft>
-                <a:spcPts val="200"/>
-              </a:spcAft>
-            </a:pPr>
-            <a:r>
-              <a:rPr sz="1000" b="1">
-                <a:solidFill>
-                  <a:srgbClr val="0F172A"/>
-                </a:solidFill>
-                <a:latin typeface="Arial"/>
-              </a:rPr>
               <a:t>• Environmental Restoration: </a:t>
             </a:r>
             <a:r>
-              <a:rPr sz="1000" b="0">
+              <a:rPr sz="950" b="0">
                 <a:solidFill>
                   <a:srgbClr val="334155"/>
                 </a:solidFill>
@@ -8282,11 +8086,13 @@
           <a:bodyPr rtlCol="0" anchor="ctr"/>
           <a:lstStyle/>
           <a:p>
-            <a:pPr algn="ctr"/>
-            <a:r>
-              <a:rPr sz="1100" b="1">
-                <a:solidFill>
-                  <a:srgbClr val="FFFFFF"/>
+            <a:pPr algn="ctr">
+              <a:buNone/>
+            </a:pPr>
+            <a:r>
+              <a:rPr sz="1050" b="1">
+                <a:solidFill>
+                  <a:srgbClr val="14532D"/>
                 </a:solidFill>
                 <a:latin typeface="Arial"/>
               </a:rPr>
@@ -8320,6 +8126,30 @@
           <a:xfrm>
             <a:off x="9780086" y="1500"/>
             <a:ext cx="2249850" cy="1062337"/>
+          </a:xfrm>
+          <a:prstGeom prst="rect">
+            <a:avLst/>
+          </a:prstGeom>
+        </p:spPr>
+      </p:pic>
+      <p:pic>
+        <p:nvPicPr>
+          <p:cNvPr id="17411" name="Picture 17410" descr="agrigpt_impact_infographic.jpg"/>
+          <p:cNvPicPr>
+            <a:picLocks noChangeAspect="1"/>
+          </p:cNvPicPr>
+          <p:nvPr/>
+        </p:nvPicPr>
+        <p:blipFill>
+          <a:blip r:embed="rId4"/>
+          <a:stretch>
+            <a:fillRect/>
+          </a:stretch>
+        </p:blipFill>
+        <p:spPr>
+          <a:xfrm>
+            <a:off x="5623560" y="1234440"/>
+            <a:ext cx="6080760" cy="4526280"/>
           </a:xfrm>
           <a:prstGeom prst="rect">
             <a:avLst/>
@@ -8445,14 +8275,21 @@
             <p:ph type="title"/>
           </p:nvPr>
         </p:nvSpPr>
-        <p:spPr/>
-        <p:txBody>
-          <a:bodyPr/>
+        <p:spPr>
+          <a:xfrm>
+            <a:off x="1691640" y="164592"/>
+            <a:ext cx="7955279" cy="868680"/>
+          </a:xfrm>
+        </p:spPr>
+        <p:txBody>
+          <a:bodyPr wrap="square"/>
           <a:lstStyle/>
           <a:p>
-            <a:pPr eaLnBrk="1" hangingPunct="1"/>
-            <a:r>
-              <a:rPr sz="2300" b="1">
+            <a:pPr eaLnBrk="1" hangingPunct="1" algn="l">
+              <a:buNone/>
+            </a:pPr>
+            <a:r>
+              <a:rPr sz="1900" b="1">
                 <a:solidFill>
                   <a:srgbClr val="14532D"/>
                 </a:solidFill>
@@ -8473,8 +8310,8 @@
         </p:nvSpPr>
         <p:spPr bwMode="auto">
           <a:xfrm>
-            <a:off x="594360" y="1188720"/>
-            <a:ext cx="10972800" cy="4937760"/>
+            <a:off x="594360" y="1143000"/>
+            <a:ext cx="10972800" cy="4983480"/>
           </a:xfrm>
           <a:prstGeom prst="rect">
             <a:avLst/>
@@ -8498,20 +8335,19 @@
                 <a:spcPct val="100000"/>
               </a:lnSpc>
               <a:spcBef>
-                <a:spcPts val="500"/>
+                <a:spcPts val="400"/>
               </a:spcBef>
               <a:spcAft>
                 <a:spcPts val="200"/>
               </a:spcAft>
               <a:buClrTx/>
               <a:buSzTx/>
-              <a:buFont typeface="Arial" panose="020B0604020202020204" pitchFamily="34" charset="0"/>
-              <a:buChar char="•"/>
               <a:tabLst/>
               <a:defRPr/>
+              <a:buNone/>
             </a:pPr>
             <a:r>
-              <a:rPr sz="1250" b="1">
+              <a:rPr sz="1200" b="1">
                 <a:solidFill>
                   <a:srgbClr val="14532D"/>
                 </a:solidFill>
@@ -8537,11 +8373,12 @@
           <a:p>
             <a:pPr>
               <a:spcBef>
-                <a:spcPts val="100"/>
+                <a:spcPts val="200"/>
               </a:spcBef>
               <a:spcAft>
-                <a:spcPts val="200"/>
+                <a:spcPts val="300"/>
               </a:spcAft>
+              <a:buNone/>
             </a:pPr>
             <a:r>
               <a:rPr sz="1000" b="1">
@@ -8565,11 +8402,12 @@
           <a:p>
             <a:pPr>
               <a:spcBef>
-                <a:spcPts val="100"/>
+                <a:spcPts val="200"/>
               </a:spcBef>
               <a:spcAft>
-                <a:spcPts val="200"/>
+                <a:spcPts val="300"/>
               </a:spcAft>
+              <a:buNone/>
             </a:pPr>
             <a:r>
               <a:rPr sz="1000" b="1">
@@ -8593,11 +8431,12 @@
           <a:p>
             <a:pPr>
               <a:spcBef>
-                <a:spcPts val="100"/>
+                <a:spcPts val="200"/>
               </a:spcBef>
               <a:spcAft>
-                <a:spcPts val="200"/>
+                <a:spcPts val="300"/>
               </a:spcAft>
+              <a:buNone/>
             </a:pPr>
             <a:r>
               <a:rPr sz="1000" b="1">
@@ -8621,11 +8460,12 @@
           <a:p>
             <a:pPr>
               <a:spcBef>
-                <a:spcPts val="100"/>
+                <a:spcPts val="200"/>
               </a:spcBef>
               <a:spcAft>
-                <a:spcPts val="200"/>
+                <a:spcPts val="300"/>
               </a:spcAft>
+              <a:buNone/>
             </a:pPr>
             <a:r>
               <a:rPr sz="1000" b="1">
@@ -8649,11 +8489,12 @@
           <a:p>
             <a:pPr>
               <a:spcBef>
-                <a:spcPts val="100"/>
+                <a:spcPts val="200"/>
               </a:spcBef>
               <a:spcAft>
-                <a:spcPts val="200"/>
+                <a:spcPts val="300"/>
               </a:spcAft>
+              <a:buNone/>
             </a:pPr>
             <a:r>
               <a:rPr sz="1000" b="1">
@@ -8677,11 +8518,12 @@
           <a:p>
             <a:pPr>
               <a:spcBef>
-                <a:spcPts val="100"/>
+                <a:spcPts val="200"/>
               </a:spcBef>
               <a:spcAft>
-                <a:spcPts val="200"/>
+                <a:spcPts val="300"/>
               </a:spcAft>
+              <a:buNone/>
             </a:pPr>
             <a:r>
               <a:rPr sz="1000" b="1">
@@ -8900,11 +8742,13 @@
           <a:bodyPr rtlCol="0" anchor="ctr"/>
           <a:lstStyle/>
           <a:p>
-            <a:pPr algn="ctr"/>
-            <a:r>
-              <a:rPr sz="1100" b="1">
-                <a:solidFill>
-                  <a:srgbClr val="FFFFFF"/>
+            <a:pPr algn="ctr">
+              <a:buNone/>
+            </a:pPr>
+            <a:r>
+              <a:rPr sz="1050" b="1">
+                <a:solidFill>
+                  <a:srgbClr val="14532D"/>
                 </a:solidFill>
                 <a:latin typeface="Arial"/>
               </a:rPr>
